--- a/聖誕老公公.pptx
+++ b/聖誕老公公.pptx
@@ -12,7 +12,7 @@
     <p:sldId id="260" r:id="rId6"/>
     <p:sldId id="261" r:id="rId7"/>
   </p:sldIdLst>
-  <p:sldSz cx="9144000" cy="6858000" type="screen4x3"/>
+  <p:sldSz cx="12192000" cy="6858000"/>
   <p:notesSz cx="6858000" cy="9144000"/>
   <p:defaultTextStyle>
     <a:defPPr>
@@ -109,6 +109,22 @@
       </a:defRPr>
     </a:lvl9pPr>
   </p:defaultTextStyle>
+  <p:extLst>
+    <p:ext uri="{EFAFB233-063F-42B5-8137-9DF3F51BA10A}">
+      <p15:sldGuideLst xmlns:p15="http://schemas.microsoft.com/office/powerpoint/2012/main">
+        <p15:guide id="1" orient="horz" pos="2160" userDrawn="1">
+          <p15:clr>
+            <a:srgbClr val="A4A3A4"/>
+          </p15:clr>
+        </p15:guide>
+        <p15:guide id="2" pos="3840" userDrawn="1">
+          <p15:clr>
+            <a:srgbClr val="A4A3A4"/>
+          </p15:clr>
+        </p15:guide>
+      </p15:sldGuideLst>
+    </p:ext>
+  </p:extLst>
 </p:presentation>
 </file>
 
@@ -141,8 +157,8 @@
         </p:nvSpPr>
         <p:spPr>
           <a:xfrm>
-            <a:off x="685800" y="2130425"/>
-            <a:ext cx="7772400" cy="1470025"/>
+            <a:off x="914400" y="2130426"/>
+            <a:ext cx="10363200" cy="1470025"/>
           </a:xfrm>
         </p:spPr>
         <p:txBody>
@@ -150,10 +166,9 @@
           <a:lstStyle/>
           <a:p>
             <a:r>
-              <a:rPr lang="zh-TW" altLang="en-US" smtClean="0"/>
+              <a:rPr lang="zh-TW" altLang="en-US"/>
               <a:t>按一下以編輯母片標題樣式</a:t>
             </a:r>
-            <a:endParaRPr lang="zh-TW" altLang="en-US"/>
           </a:p>
         </p:txBody>
       </p:sp>
@@ -169,8 +184,8 @@
         </p:nvSpPr>
         <p:spPr>
           <a:xfrm>
-            <a:off x="1371600" y="3886200"/>
-            <a:ext cx="6400800" cy="1752600"/>
+            <a:off x="1828800" y="3886200"/>
+            <a:ext cx="8534400" cy="1752600"/>
           </a:xfrm>
         </p:spPr>
         <p:txBody>
@@ -269,10 +284,9 @@
           </a:lstStyle>
           <a:p>
             <a:r>
-              <a:rPr lang="zh-TW" altLang="en-US" smtClean="0"/>
+              <a:rPr lang="zh-TW" altLang="en-US"/>
               <a:t>按一下以編輯母片副標題樣式</a:t>
             </a:r>
-            <a:endParaRPr lang="zh-TW" altLang="en-US"/>
           </a:p>
         </p:txBody>
       </p:sp>
@@ -293,7 +307,7 @@
           <a:p>
             <a:fld id="{CA356F11-2A2E-40F5-B88D-0B9FAEE52B04}" type="datetimeFigureOut">
               <a:rPr lang="zh-TW" altLang="en-US" smtClean="0"/>
-              <a:t>2018/11/3</a:t>
+              <a:t>2025/6/28</a:t>
             </a:fld>
             <a:endParaRPr lang="zh-TW" altLang="en-US"/>
           </a:p>
@@ -387,10 +401,9 @@
           <a:lstStyle/>
           <a:p>
             <a:r>
-              <a:rPr lang="zh-TW" altLang="en-US" smtClean="0"/>
+              <a:rPr lang="zh-TW" altLang="en-US"/>
               <a:t>按一下以編輯母片標題樣式</a:t>
             </a:r>
-            <a:endParaRPr lang="zh-TW" altLang="en-US"/>
           </a:p>
         </p:txBody>
       </p:sp>
@@ -411,38 +424,37 @@
           <a:p>
             <a:pPr lvl="0"/>
             <a:r>
-              <a:rPr lang="zh-TW" altLang="en-US" smtClean="0"/>
+              <a:rPr lang="zh-TW" altLang="en-US"/>
               <a:t>按一下以編輯母片文字樣式</a:t>
             </a:r>
           </a:p>
           <a:p>
             <a:pPr lvl="1"/>
             <a:r>
-              <a:rPr lang="zh-TW" altLang="en-US" smtClean="0"/>
+              <a:rPr lang="zh-TW" altLang="en-US"/>
               <a:t>第二層</a:t>
             </a:r>
           </a:p>
           <a:p>
             <a:pPr lvl="2"/>
             <a:r>
-              <a:rPr lang="zh-TW" altLang="en-US" smtClean="0"/>
+              <a:rPr lang="zh-TW" altLang="en-US"/>
               <a:t>第三層</a:t>
             </a:r>
           </a:p>
           <a:p>
             <a:pPr lvl="3"/>
             <a:r>
-              <a:rPr lang="zh-TW" altLang="en-US" smtClean="0"/>
+              <a:rPr lang="zh-TW" altLang="en-US"/>
               <a:t>第四層</a:t>
             </a:r>
           </a:p>
           <a:p>
             <a:pPr lvl="4"/>
             <a:r>
-              <a:rPr lang="zh-TW" altLang="en-US" smtClean="0"/>
+              <a:rPr lang="zh-TW" altLang="en-US"/>
               <a:t>第五層</a:t>
             </a:r>
-            <a:endParaRPr lang="zh-TW" altLang="en-US"/>
           </a:p>
         </p:txBody>
       </p:sp>
@@ -463,7 +475,7 @@
           <a:p>
             <a:fld id="{CA356F11-2A2E-40F5-B88D-0B9FAEE52B04}" type="datetimeFigureOut">
               <a:rPr lang="zh-TW" altLang="en-US" smtClean="0"/>
-              <a:t>2018/11/3</a:t>
+              <a:t>2025/6/28</a:t>
             </a:fld>
             <a:endParaRPr lang="zh-TW" altLang="en-US"/>
           </a:p>
@@ -553,8 +565,8 @@
         </p:nvSpPr>
         <p:spPr>
           <a:xfrm>
-            <a:off x="6629400" y="274638"/>
-            <a:ext cx="2057400" cy="5851525"/>
+            <a:off x="8839200" y="274639"/>
+            <a:ext cx="2743200" cy="5851525"/>
           </a:xfrm>
         </p:spPr>
         <p:txBody>
@@ -562,10 +574,9 @@
           <a:lstStyle/>
           <a:p>
             <a:r>
-              <a:rPr lang="zh-TW" altLang="en-US" smtClean="0"/>
+              <a:rPr lang="zh-TW" altLang="en-US"/>
               <a:t>按一下以編輯母片標題樣式</a:t>
             </a:r>
-            <a:endParaRPr lang="zh-TW" altLang="en-US"/>
           </a:p>
         </p:txBody>
       </p:sp>
@@ -581,8 +592,8 @@
         </p:nvSpPr>
         <p:spPr>
           <a:xfrm>
-            <a:off x="457200" y="274638"/>
-            <a:ext cx="6019800" cy="5851525"/>
+            <a:off x="609600" y="274639"/>
+            <a:ext cx="8026400" cy="5851525"/>
           </a:xfrm>
         </p:spPr>
         <p:txBody>
@@ -591,38 +602,37 @@
           <a:p>
             <a:pPr lvl="0"/>
             <a:r>
-              <a:rPr lang="zh-TW" altLang="en-US" smtClean="0"/>
+              <a:rPr lang="zh-TW" altLang="en-US"/>
               <a:t>按一下以編輯母片文字樣式</a:t>
             </a:r>
           </a:p>
           <a:p>
             <a:pPr lvl="1"/>
             <a:r>
-              <a:rPr lang="zh-TW" altLang="en-US" smtClean="0"/>
+              <a:rPr lang="zh-TW" altLang="en-US"/>
               <a:t>第二層</a:t>
             </a:r>
           </a:p>
           <a:p>
             <a:pPr lvl="2"/>
             <a:r>
-              <a:rPr lang="zh-TW" altLang="en-US" smtClean="0"/>
+              <a:rPr lang="zh-TW" altLang="en-US"/>
               <a:t>第三層</a:t>
             </a:r>
           </a:p>
           <a:p>
             <a:pPr lvl="3"/>
             <a:r>
-              <a:rPr lang="zh-TW" altLang="en-US" smtClean="0"/>
+              <a:rPr lang="zh-TW" altLang="en-US"/>
               <a:t>第四層</a:t>
             </a:r>
           </a:p>
           <a:p>
             <a:pPr lvl="4"/>
             <a:r>
-              <a:rPr lang="zh-TW" altLang="en-US" smtClean="0"/>
+              <a:rPr lang="zh-TW" altLang="en-US"/>
               <a:t>第五層</a:t>
             </a:r>
-            <a:endParaRPr lang="zh-TW" altLang="en-US"/>
           </a:p>
         </p:txBody>
       </p:sp>
@@ -643,7 +653,7 @@
           <a:p>
             <a:fld id="{CA356F11-2A2E-40F5-B88D-0B9FAEE52B04}" type="datetimeFigureOut">
               <a:rPr lang="zh-TW" altLang="en-US" smtClean="0"/>
-              <a:t>2018/11/3</a:t>
+              <a:t>2025/6/28</a:t>
             </a:fld>
             <a:endParaRPr lang="zh-TW" altLang="en-US"/>
           </a:p>
@@ -737,10 +747,9 @@
           <a:lstStyle/>
           <a:p>
             <a:r>
-              <a:rPr lang="zh-TW" altLang="en-US" smtClean="0"/>
+              <a:rPr lang="zh-TW" altLang="en-US"/>
               <a:t>按一下以編輯母片標題樣式</a:t>
             </a:r>
-            <a:endParaRPr lang="zh-TW" altLang="en-US"/>
           </a:p>
         </p:txBody>
       </p:sp>
@@ -761,38 +770,37 @@
           <a:p>
             <a:pPr lvl="0"/>
             <a:r>
-              <a:rPr lang="zh-TW" altLang="en-US" smtClean="0"/>
+              <a:rPr lang="zh-TW" altLang="en-US"/>
               <a:t>按一下以編輯母片文字樣式</a:t>
             </a:r>
           </a:p>
           <a:p>
             <a:pPr lvl="1"/>
             <a:r>
-              <a:rPr lang="zh-TW" altLang="en-US" smtClean="0"/>
+              <a:rPr lang="zh-TW" altLang="en-US"/>
               <a:t>第二層</a:t>
             </a:r>
           </a:p>
           <a:p>
             <a:pPr lvl="2"/>
             <a:r>
-              <a:rPr lang="zh-TW" altLang="en-US" smtClean="0"/>
+              <a:rPr lang="zh-TW" altLang="en-US"/>
               <a:t>第三層</a:t>
             </a:r>
           </a:p>
           <a:p>
             <a:pPr lvl="3"/>
             <a:r>
-              <a:rPr lang="zh-TW" altLang="en-US" smtClean="0"/>
+              <a:rPr lang="zh-TW" altLang="en-US"/>
               <a:t>第四層</a:t>
             </a:r>
           </a:p>
           <a:p>
             <a:pPr lvl="4"/>
             <a:r>
-              <a:rPr lang="zh-TW" altLang="en-US" smtClean="0"/>
+              <a:rPr lang="zh-TW" altLang="en-US"/>
               <a:t>第五層</a:t>
             </a:r>
-            <a:endParaRPr lang="zh-TW" altLang="en-US"/>
           </a:p>
         </p:txBody>
       </p:sp>
@@ -813,7 +821,7 @@
           <a:p>
             <a:fld id="{CA356F11-2A2E-40F5-B88D-0B9FAEE52B04}" type="datetimeFigureOut">
               <a:rPr lang="zh-TW" altLang="en-US" smtClean="0"/>
-              <a:t>2018/11/3</a:t>
+              <a:t>2025/6/28</a:t>
             </a:fld>
             <a:endParaRPr lang="zh-TW" altLang="en-US"/>
           </a:p>
@@ -903,8 +911,8 @@
         </p:nvSpPr>
         <p:spPr>
           <a:xfrm>
-            <a:off x="722313" y="4406900"/>
-            <a:ext cx="7772400" cy="1362075"/>
+            <a:off x="963084" y="4406901"/>
+            <a:ext cx="10363200" cy="1362075"/>
           </a:xfrm>
         </p:spPr>
         <p:txBody>
@@ -916,10 +924,9 @@
           </a:lstStyle>
           <a:p>
             <a:r>
-              <a:rPr lang="zh-TW" altLang="en-US" smtClean="0"/>
+              <a:rPr lang="zh-TW" altLang="en-US"/>
               <a:t>按一下以編輯母片標題樣式</a:t>
             </a:r>
-            <a:endParaRPr lang="zh-TW" altLang="en-US"/>
           </a:p>
         </p:txBody>
       </p:sp>
@@ -935,8 +942,8 @@
         </p:nvSpPr>
         <p:spPr>
           <a:xfrm>
-            <a:off x="722313" y="2906713"/>
-            <a:ext cx="7772400" cy="1500187"/>
+            <a:off x="963084" y="2906713"/>
+            <a:ext cx="10363200" cy="1500187"/>
           </a:xfrm>
         </p:spPr>
         <p:txBody>
@@ -1036,7 +1043,7 @@
           <a:p>
             <a:pPr lvl="0"/>
             <a:r>
-              <a:rPr lang="zh-TW" altLang="en-US" smtClean="0"/>
+              <a:rPr lang="zh-TW" altLang="en-US"/>
               <a:t>按一下以編輯母片文字樣式</a:t>
             </a:r>
           </a:p>
@@ -1059,7 +1066,7 @@
           <a:p>
             <a:fld id="{CA356F11-2A2E-40F5-B88D-0B9FAEE52B04}" type="datetimeFigureOut">
               <a:rPr lang="zh-TW" altLang="en-US" smtClean="0"/>
-              <a:t>2018/11/3</a:t>
+              <a:t>2025/6/28</a:t>
             </a:fld>
             <a:endParaRPr lang="zh-TW" altLang="en-US"/>
           </a:p>
@@ -1153,10 +1160,9 @@
           <a:lstStyle/>
           <a:p>
             <a:r>
-              <a:rPr lang="zh-TW" altLang="en-US" smtClean="0"/>
+              <a:rPr lang="zh-TW" altLang="en-US"/>
               <a:t>按一下以編輯母片標題樣式</a:t>
             </a:r>
-            <a:endParaRPr lang="zh-TW" altLang="en-US"/>
           </a:p>
         </p:txBody>
       </p:sp>
@@ -1172,8 +1178,8 @@
         </p:nvSpPr>
         <p:spPr>
           <a:xfrm>
-            <a:off x="457200" y="1600200"/>
-            <a:ext cx="4038600" cy="4525963"/>
+            <a:off x="609600" y="1600201"/>
+            <a:ext cx="5384800" cy="4525963"/>
           </a:xfrm>
         </p:spPr>
         <p:txBody>
@@ -1210,38 +1216,37 @@
           <a:p>
             <a:pPr lvl="0"/>
             <a:r>
-              <a:rPr lang="zh-TW" altLang="en-US" smtClean="0"/>
+              <a:rPr lang="zh-TW" altLang="en-US"/>
               <a:t>按一下以編輯母片文字樣式</a:t>
             </a:r>
           </a:p>
           <a:p>
             <a:pPr lvl="1"/>
             <a:r>
-              <a:rPr lang="zh-TW" altLang="en-US" smtClean="0"/>
+              <a:rPr lang="zh-TW" altLang="en-US"/>
               <a:t>第二層</a:t>
             </a:r>
           </a:p>
           <a:p>
             <a:pPr lvl="2"/>
             <a:r>
-              <a:rPr lang="zh-TW" altLang="en-US" smtClean="0"/>
+              <a:rPr lang="zh-TW" altLang="en-US"/>
               <a:t>第三層</a:t>
             </a:r>
           </a:p>
           <a:p>
             <a:pPr lvl="3"/>
             <a:r>
-              <a:rPr lang="zh-TW" altLang="en-US" smtClean="0"/>
+              <a:rPr lang="zh-TW" altLang="en-US"/>
               <a:t>第四層</a:t>
             </a:r>
           </a:p>
           <a:p>
             <a:pPr lvl="4"/>
             <a:r>
-              <a:rPr lang="zh-TW" altLang="en-US" smtClean="0"/>
+              <a:rPr lang="zh-TW" altLang="en-US"/>
               <a:t>第五層</a:t>
             </a:r>
-            <a:endParaRPr lang="zh-TW" altLang="en-US"/>
           </a:p>
         </p:txBody>
       </p:sp>
@@ -1257,8 +1262,8 @@
         </p:nvSpPr>
         <p:spPr>
           <a:xfrm>
-            <a:off x="4648200" y="1600200"/>
-            <a:ext cx="4038600" cy="4525963"/>
+            <a:off x="6197600" y="1600201"/>
+            <a:ext cx="5384800" cy="4525963"/>
           </a:xfrm>
         </p:spPr>
         <p:txBody>
@@ -1295,38 +1300,37 @@
           <a:p>
             <a:pPr lvl="0"/>
             <a:r>
-              <a:rPr lang="zh-TW" altLang="en-US" smtClean="0"/>
+              <a:rPr lang="zh-TW" altLang="en-US"/>
               <a:t>按一下以編輯母片文字樣式</a:t>
             </a:r>
           </a:p>
           <a:p>
             <a:pPr lvl="1"/>
             <a:r>
-              <a:rPr lang="zh-TW" altLang="en-US" smtClean="0"/>
+              <a:rPr lang="zh-TW" altLang="en-US"/>
               <a:t>第二層</a:t>
             </a:r>
           </a:p>
           <a:p>
             <a:pPr lvl="2"/>
             <a:r>
-              <a:rPr lang="zh-TW" altLang="en-US" smtClean="0"/>
+              <a:rPr lang="zh-TW" altLang="en-US"/>
               <a:t>第三層</a:t>
             </a:r>
           </a:p>
           <a:p>
             <a:pPr lvl="3"/>
             <a:r>
-              <a:rPr lang="zh-TW" altLang="en-US" smtClean="0"/>
+              <a:rPr lang="zh-TW" altLang="en-US"/>
               <a:t>第四層</a:t>
             </a:r>
           </a:p>
           <a:p>
             <a:pPr lvl="4"/>
             <a:r>
-              <a:rPr lang="zh-TW" altLang="en-US" smtClean="0"/>
+              <a:rPr lang="zh-TW" altLang="en-US"/>
               <a:t>第五層</a:t>
             </a:r>
-            <a:endParaRPr lang="zh-TW" altLang="en-US"/>
           </a:p>
         </p:txBody>
       </p:sp>
@@ -1347,7 +1351,7 @@
           <a:p>
             <a:fld id="{CA356F11-2A2E-40F5-B88D-0B9FAEE52B04}" type="datetimeFigureOut">
               <a:rPr lang="zh-TW" altLang="en-US" smtClean="0"/>
-              <a:t>2018/11/3</a:t>
+              <a:t>2025/6/28</a:t>
             </a:fld>
             <a:endParaRPr lang="zh-TW" altLang="en-US"/>
           </a:p>
@@ -1445,10 +1449,9 @@
           </a:lstStyle>
           <a:p>
             <a:r>
-              <a:rPr lang="zh-TW" altLang="en-US" smtClean="0"/>
+              <a:rPr lang="zh-TW" altLang="en-US"/>
               <a:t>按一下以編輯母片標題樣式</a:t>
             </a:r>
-            <a:endParaRPr lang="zh-TW" altLang="en-US"/>
           </a:p>
         </p:txBody>
       </p:sp>
@@ -1464,8 +1467,8 @@
         </p:nvSpPr>
         <p:spPr>
           <a:xfrm>
-            <a:off x="457200" y="1535113"/>
-            <a:ext cx="4040188" cy="639762"/>
+            <a:off x="609600" y="1535113"/>
+            <a:ext cx="5386917" cy="639762"/>
           </a:xfrm>
         </p:spPr>
         <p:txBody>
@@ -1511,7 +1514,7 @@
           <a:p>
             <a:pPr lvl="0"/>
             <a:r>
-              <a:rPr lang="zh-TW" altLang="en-US" smtClean="0"/>
+              <a:rPr lang="zh-TW" altLang="en-US"/>
               <a:t>按一下以編輯母片文字樣式</a:t>
             </a:r>
           </a:p>
@@ -1529,8 +1532,8 @@
         </p:nvSpPr>
         <p:spPr>
           <a:xfrm>
-            <a:off x="457200" y="2174875"/>
-            <a:ext cx="4040188" cy="3951288"/>
+            <a:off x="609600" y="2174875"/>
+            <a:ext cx="5386917" cy="3951288"/>
           </a:xfrm>
         </p:spPr>
         <p:txBody>
@@ -1567,38 +1570,37 @@
           <a:p>
             <a:pPr lvl="0"/>
             <a:r>
-              <a:rPr lang="zh-TW" altLang="en-US" smtClean="0"/>
+              <a:rPr lang="zh-TW" altLang="en-US"/>
               <a:t>按一下以編輯母片文字樣式</a:t>
             </a:r>
           </a:p>
           <a:p>
             <a:pPr lvl="1"/>
             <a:r>
-              <a:rPr lang="zh-TW" altLang="en-US" smtClean="0"/>
+              <a:rPr lang="zh-TW" altLang="en-US"/>
               <a:t>第二層</a:t>
             </a:r>
           </a:p>
           <a:p>
             <a:pPr lvl="2"/>
             <a:r>
-              <a:rPr lang="zh-TW" altLang="en-US" smtClean="0"/>
+              <a:rPr lang="zh-TW" altLang="en-US"/>
               <a:t>第三層</a:t>
             </a:r>
           </a:p>
           <a:p>
             <a:pPr lvl="3"/>
             <a:r>
-              <a:rPr lang="zh-TW" altLang="en-US" smtClean="0"/>
+              <a:rPr lang="zh-TW" altLang="en-US"/>
               <a:t>第四層</a:t>
             </a:r>
           </a:p>
           <a:p>
             <a:pPr lvl="4"/>
             <a:r>
-              <a:rPr lang="zh-TW" altLang="en-US" smtClean="0"/>
+              <a:rPr lang="zh-TW" altLang="en-US"/>
               <a:t>第五層</a:t>
             </a:r>
-            <a:endParaRPr lang="zh-TW" altLang="en-US"/>
           </a:p>
         </p:txBody>
       </p:sp>
@@ -1614,8 +1616,8 @@
         </p:nvSpPr>
         <p:spPr>
           <a:xfrm>
-            <a:off x="4645025" y="1535113"/>
-            <a:ext cx="4041775" cy="639762"/>
+            <a:off x="6193368" y="1535113"/>
+            <a:ext cx="5389033" cy="639762"/>
           </a:xfrm>
         </p:spPr>
         <p:txBody>
@@ -1661,7 +1663,7 @@
           <a:p>
             <a:pPr lvl="0"/>
             <a:r>
-              <a:rPr lang="zh-TW" altLang="en-US" smtClean="0"/>
+              <a:rPr lang="zh-TW" altLang="en-US"/>
               <a:t>按一下以編輯母片文字樣式</a:t>
             </a:r>
           </a:p>
@@ -1679,8 +1681,8 @@
         </p:nvSpPr>
         <p:spPr>
           <a:xfrm>
-            <a:off x="4645025" y="2174875"/>
-            <a:ext cx="4041775" cy="3951288"/>
+            <a:off x="6193368" y="2174875"/>
+            <a:ext cx="5389033" cy="3951288"/>
           </a:xfrm>
         </p:spPr>
         <p:txBody>
@@ -1717,38 +1719,37 @@
           <a:p>
             <a:pPr lvl="0"/>
             <a:r>
-              <a:rPr lang="zh-TW" altLang="en-US" smtClean="0"/>
+              <a:rPr lang="zh-TW" altLang="en-US"/>
               <a:t>按一下以編輯母片文字樣式</a:t>
             </a:r>
           </a:p>
           <a:p>
             <a:pPr lvl="1"/>
             <a:r>
-              <a:rPr lang="zh-TW" altLang="en-US" smtClean="0"/>
+              <a:rPr lang="zh-TW" altLang="en-US"/>
               <a:t>第二層</a:t>
             </a:r>
           </a:p>
           <a:p>
             <a:pPr lvl="2"/>
             <a:r>
-              <a:rPr lang="zh-TW" altLang="en-US" smtClean="0"/>
+              <a:rPr lang="zh-TW" altLang="en-US"/>
               <a:t>第三層</a:t>
             </a:r>
           </a:p>
           <a:p>
             <a:pPr lvl="3"/>
             <a:r>
-              <a:rPr lang="zh-TW" altLang="en-US" smtClean="0"/>
+              <a:rPr lang="zh-TW" altLang="en-US"/>
               <a:t>第四層</a:t>
             </a:r>
           </a:p>
           <a:p>
             <a:pPr lvl="4"/>
             <a:r>
-              <a:rPr lang="zh-TW" altLang="en-US" smtClean="0"/>
+              <a:rPr lang="zh-TW" altLang="en-US"/>
               <a:t>第五層</a:t>
             </a:r>
-            <a:endParaRPr lang="zh-TW" altLang="en-US"/>
           </a:p>
         </p:txBody>
       </p:sp>
@@ -1769,7 +1770,7 @@
           <a:p>
             <a:fld id="{CA356F11-2A2E-40F5-B88D-0B9FAEE52B04}" type="datetimeFigureOut">
               <a:rPr lang="zh-TW" altLang="en-US" smtClean="0"/>
-              <a:t>2018/11/3</a:t>
+              <a:t>2025/6/28</a:t>
             </a:fld>
             <a:endParaRPr lang="zh-TW" altLang="en-US"/>
           </a:p>
@@ -1863,10 +1864,9 @@
           <a:lstStyle/>
           <a:p>
             <a:r>
-              <a:rPr lang="zh-TW" altLang="en-US" smtClean="0"/>
+              <a:rPr lang="zh-TW" altLang="en-US"/>
               <a:t>按一下以編輯母片標題樣式</a:t>
             </a:r>
-            <a:endParaRPr lang="zh-TW" altLang="en-US"/>
           </a:p>
         </p:txBody>
       </p:sp>
@@ -1887,7 +1887,7 @@
           <a:p>
             <a:fld id="{CA356F11-2A2E-40F5-B88D-0B9FAEE52B04}" type="datetimeFigureOut">
               <a:rPr lang="zh-TW" altLang="en-US" smtClean="0"/>
-              <a:t>2018/11/3</a:t>
+              <a:t>2025/6/28</a:t>
             </a:fld>
             <a:endParaRPr lang="zh-TW" altLang="en-US"/>
           </a:p>
@@ -1982,7 +1982,7 @@
           <a:p>
             <a:fld id="{CA356F11-2A2E-40F5-B88D-0B9FAEE52B04}" type="datetimeFigureOut">
               <a:rPr lang="zh-TW" altLang="en-US" smtClean="0"/>
-              <a:t>2018/11/3</a:t>
+              <a:t>2025/6/28</a:t>
             </a:fld>
             <a:endParaRPr lang="zh-TW" altLang="en-US"/>
           </a:p>
@@ -2072,8 +2072,8 @@
         </p:nvSpPr>
         <p:spPr>
           <a:xfrm>
-            <a:off x="457200" y="273050"/>
-            <a:ext cx="3008313" cy="1162050"/>
+            <a:off x="609601" y="273050"/>
+            <a:ext cx="4011084" cy="1162050"/>
           </a:xfrm>
         </p:spPr>
         <p:txBody>
@@ -2085,10 +2085,9 @@
           </a:lstStyle>
           <a:p>
             <a:r>
-              <a:rPr lang="zh-TW" altLang="en-US" smtClean="0"/>
+              <a:rPr lang="zh-TW" altLang="en-US"/>
               <a:t>按一下以編輯母片標題樣式</a:t>
             </a:r>
-            <a:endParaRPr lang="zh-TW" altLang="en-US"/>
           </a:p>
         </p:txBody>
       </p:sp>
@@ -2104,8 +2103,8 @@
         </p:nvSpPr>
         <p:spPr>
           <a:xfrm>
-            <a:off x="3575050" y="273050"/>
-            <a:ext cx="5111750" cy="5853113"/>
+            <a:off x="4766733" y="273051"/>
+            <a:ext cx="6815667" cy="5853113"/>
           </a:xfrm>
         </p:spPr>
         <p:txBody>
@@ -2142,38 +2141,37 @@
           <a:p>
             <a:pPr lvl="0"/>
             <a:r>
-              <a:rPr lang="zh-TW" altLang="en-US" smtClean="0"/>
+              <a:rPr lang="zh-TW" altLang="en-US"/>
               <a:t>按一下以編輯母片文字樣式</a:t>
             </a:r>
           </a:p>
           <a:p>
             <a:pPr lvl="1"/>
             <a:r>
-              <a:rPr lang="zh-TW" altLang="en-US" smtClean="0"/>
+              <a:rPr lang="zh-TW" altLang="en-US"/>
               <a:t>第二層</a:t>
             </a:r>
           </a:p>
           <a:p>
             <a:pPr lvl="2"/>
             <a:r>
-              <a:rPr lang="zh-TW" altLang="en-US" smtClean="0"/>
+              <a:rPr lang="zh-TW" altLang="en-US"/>
               <a:t>第三層</a:t>
             </a:r>
           </a:p>
           <a:p>
             <a:pPr lvl="3"/>
             <a:r>
-              <a:rPr lang="zh-TW" altLang="en-US" smtClean="0"/>
+              <a:rPr lang="zh-TW" altLang="en-US"/>
               <a:t>第四層</a:t>
             </a:r>
           </a:p>
           <a:p>
             <a:pPr lvl="4"/>
             <a:r>
-              <a:rPr lang="zh-TW" altLang="en-US" smtClean="0"/>
+              <a:rPr lang="zh-TW" altLang="en-US"/>
               <a:t>第五層</a:t>
             </a:r>
-            <a:endParaRPr lang="zh-TW" altLang="en-US"/>
           </a:p>
         </p:txBody>
       </p:sp>
@@ -2189,8 +2187,8 @@
         </p:nvSpPr>
         <p:spPr>
           <a:xfrm>
-            <a:off x="457200" y="1435100"/>
-            <a:ext cx="3008313" cy="4691063"/>
+            <a:off x="609601" y="1435101"/>
+            <a:ext cx="4011084" cy="4691063"/>
           </a:xfrm>
         </p:spPr>
         <p:txBody>
@@ -2236,7 +2234,7 @@
           <a:p>
             <a:pPr lvl="0"/>
             <a:r>
-              <a:rPr lang="zh-TW" altLang="en-US" smtClean="0"/>
+              <a:rPr lang="zh-TW" altLang="en-US"/>
               <a:t>按一下以編輯母片文字樣式</a:t>
             </a:r>
           </a:p>
@@ -2259,7 +2257,7 @@
           <a:p>
             <a:fld id="{CA356F11-2A2E-40F5-B88D-0B9FAEE52B04}" type="datetimeFigureOut">
               <a:rPr lang="zh-TW" altLang="en-US" smtClean="0"/>
-              <a:t>2018/11/3</a:t>
+              <a:t>2025/6/28</a:t>
             </a:fld>
             <a:endParaRPr lang="zh-TW" altLang="en-US"/>
           </a:p>
@@ -2349,8 +2347,8 @@
         </p:nvSpPr>
         <p:spPr>
           <a:xfrm>
-            <a:off x="1792288" y="4800600"/>
-            <a:ext cx="5486400" cy="566738"/>
+            <a:off x="2389717" y="4800600"/>
+            <a:ext cx="7315200" cy="566738"/>
           </a:xfrm>
         </p:spPr>
         <p:txBody>
@@ -2362,10 +2360,9 @@
           </a:lstStyle>
           <a:p>
             <a:r>
-              <a:rPr lang="zh-TW" altLang="en-US" smtClean="0"/>
+              <a:rPr lang="zh-TW" altLang="en-US"/>
               <a:t>按一下以編輯母片標題樣式</a:t>
             </a:r>
-            <a:endParaRPr lang="zh-TW" altLang="en-US"/>
           </a:p>
         </p:txBody>
       </p:sp>
@@ -2381,8 +2378,8 @@
         </p:nvSpPr>
         <p:spPr>
           <a:xfrm>
-            <a:off x="1792288" y="612775"/>
-            <a:ext cx="5486400" cy="4114800"/>
+            <a:off x="2389717" y="612775"/>
+            <a:ext cx="7315200" cy="4114800"/>
           </a:xfrm>
         </p:spPr>
         <p:txBody>
@@ -2442,8 +2439,8 @@
         </p:nvSpPr>
         <p:spPr>
           <a:xfrm>
-            <a:off x="1792288" y="5367338"/>
-            <a:ext cx="5486400" cy="804862"/>
+            <a:off x="2389717" y="5367338"/>
+            <a:ext cx="7315200" cy="804862"/>
           </a:xfrm>
         </p:spPr>
         <p:txBody>
@@ -2489,7 +2486,7 @@
           <a:p>
             <a:pPr lvl="0"/>
             <a:r>
-              <a:rPr lang="zh-TW" altLang="en-US" smtClean="0"/>
+              <a:rPr lang="zh-TW" altLang="en-US"/>
               <a:t>按一下以編輯母片文字樣式</a:t>
             </a:r>
           </a:p>
@@ -2512,7 +2509,7 @@
           <a:p>
             <a:fld id="{CA356F11-2A2E-40F5-B88D-0B9FAEE52B04}" type="datetimeFigureOut">
               <a:rPr lang="zh-TW" altLang="en-US" smtClean="0"/>
-              <a:t>2018/11/3</a:t>
+              <a:t>2025/6/28</a:t>
             </a:fld>
             <a:endParaRPr lang="zh-TW" altLang="en-US"/>
           </a:p>
@@ -2607,8 +2604,8 @@
         </p:nvSpPr>
         <p:spPr>
           <a:xfrm>
-            <a:off x="457200" y="274638"/>
-            <a:ext cx="8229600" cy="1143000"/>
+            <a:off x="609600" y="274638"/>
+            <a:ext cx="10972800" cy="1143000"/>
           </a:xfrm>
           <a:prstGeom prst="rect">
             <a:avLst/>
@@ -2621,10 +2618,9 @@
           <a:lstStyle/>
           <a:p>
             <a:r>
-              <a:rPr lang="zh-TW" altLang="en-US" smtClean="0"/>
+              <a:rPr lang="zh-TW" altLang="en-US"/>
               <a:t>按一下以編輯母片標題樣式</a:t>
             </a:r>
-            <a:endParaRPr lang="zh-TW" altLang="en-US"/>
           </a:p>
         </p:txBody>
       </p:sp>
@@ -2640,8 +2636,8 @@
         </p:nvSpPr>
         <p:spPr>
           <a:xfrm>
-            <a:off x="457200" y="1600200"/>
-            <a:ext cx="8229600" cy="4525963"/>
+            <a:off x="609600" y="1600201"/>
+            <a:ext cx="10972800" cy="4525963"/>
           </a:xfrm>
           <a:prstGeom prst="rect">
             <a:avLst/>
@@ -2655,38 +2651,37 @@
           <a:p>
             <a:pPr lvl="0"/>
             <a:r>
-              <a:rPr lang="zh-TW" altLang="en-US" smtClean="0"/>
+              <a:rPr lang="zh-TW" altLang="en-US"/>
               <a:t>按一下以編輯母片文字樣式</a:t>
             </a:r>
           </a:p>
           <a:p>
             <a:pPr lvl="1"/>
             <a:r>
-              <a:rPr lang="zh-TW" altLang="en-US" smtClean="0"/>
+              <a:rPr lang="zh-TW" altLang="en-US"/>
               <a:t>第二層</a:t>
             </a:r>
           </a:p>
           <a:p>
             <a:pPr lvl="2"/>
             <a:r>
-              <a:rPr lang="zh-TW" altLang="en-US" smtClean="0"/>
+              <a:rPr lang="zh-TW" altLang="en-US"/>
               <a:t>第三層</a:t>
             </a:r>
           </a:p>
           <a:p>
             <a:pPr lvl="3"/>
             <a:r>
-              <a:rPr lang="zh-TW" altLang="en-US" smtClean="0"/>
+              <a:rPr lang="zh-TW" altLang="en-US"/>
               <a:t>第四層</a:t>
             </a:r>
           </a:p>
           <a:p>
             <a:pPr lvl="4"/>
             <a:r>
-              <a:rPr lang="zh-TW" altLang="en-US" smtClean="0"/>
+              <a:rPr lang="zh-TW" altLang="en-US"/>
               <a:t>第五層</a:t>
             </a:r>
-            <a:endParaRPr lang="zh-TW" altLang="en-US"/>
           </a:p>
         </p:txBody>
       </p:sp>
@@ -2702,8 +2697,8 @@
         </p:nvSpPr>
         <p:spPr>
           <a:xfrm>
-            <a:off x="457200" y="6356350"/>
-            <a:ext cx="2133600" cy="365125"/>
+            <a:off x="609600" y="6356351"/>
+            <a:ext cx="2844800" cy="365125"/>
           </a:xfrm>
           <a:prstGeom prst="rect">
             <a:avLst/>
@@ -2725,7 +2720,7 @@
           <a:p>
             <a:fld id="{CA356F11-2A2E-40F5-B88D-0B9FAEE52B04}" type="datetimeFigureOut">
               <a:rPr lang="zh-TW" altLang="en-US" smtClean="0"/>
-              <a:t>2018/11/3</a:t>
+              <a:t>2025/6/28</a:t>
             </a:fld>
             <a:endParaRPr lang="zh-TW" altLang="en-US"/>
           </a:p>
@@ -2743,8 +2738,8 @@
         </p:nvSpPr>
         <p:spPr>
           <a:xfrm>
-            <a:off x="3124200" y="6356350"/>
-            <a:ext cx="2895600" cy="365125"/>
+            <a:off x="4165600" y="6356351"/>
+            <a:ext cx="3860800" cy="365125"/>
           </a:xfrm>
           <a:prstGeom prst="rect">
             <a:avLst/>
@@ -2780,8 +2775,8 @@
         </p:nvSpPr>
         <p:spPr>
           <a:xfrm>
-            <a:off x="6553200" y="6356350"/>
-            <a:ext cx="2133600" cy="365125"/>
+            <a:off x="8737600" y="6356351"/>
+            <a:ext cx="2844800" cy="365125"/>
           </a:xfrm>
           <a:prstGeom prst="rect">
             <a:avLst/>
@@ -3124,7 +3119,7 @@
         <p:spPr bwMode="auto">
           <a:xfrm>
             <a:off x="0" y="-11410"/>
-            <a:ext cx="9157059" cy="6869410"/>
+            <a:ext cx="12191999" cy="6869410"/>
           </a:xfrm>
           <a:prstGeom prst="rect">
             <a:avLst/>
@@ -3159,7 +3154,7 @@
           <a:lstStyle/>
           <a:p>
             <a:r>
-              <a:rPr lang="zh-TW" altLang="en-US" sz="6600" b="1" dirty="0" smtClean="0">
+              <a:rPr lang="zh-TW" altLang="en-US" sz="6600" b="1" dirty="0">
                 <a:solidFill>
                   <a:srgbClr val="FF0000"/>
                 </a:solidFill>
@@ -3168,13 +3163,6 @@
               </a:rPr>
               <a:t>聖誕老公公</a:t>
             </a:r>
-            <a:endParaRPr lang="zh-TW" altLang="en-US" sz="6600" b="1" dirty="0">
-              <a:solidFill>
-                <a:srgbClr val="FF0000"/>
-              </a:solidFill>
-              <a:latin typeface="標楷體" pitchFamily="65" charset="-120"/>
-              <a:ea typeface="標楷體" pitchFamily="65" charset="-120"/>
-            </a:endParaRPr>
           </a:p>
         </p:txBody>
       </p:sp>
@@ -3249,8 +3237,8 @@
         </p:blipFill>
         <p:spPr>
           <a:xfrm>
-            <a:off x="-4019" y="0"/>
-            <a:ext cx="9141718" cy="6858000"/>
+            <a:off x="0" y="0"/>
+            <a:ext cx="12288688" cy="6858000"/>
           </a:xfrm>
           <a:prstGeom prst="rect">
             <a:avLst/>
@@ -3269,13 +3257,13 @@
         </p:nvSpPr>
         <p:spPr>
           <a:xfrm>
-            <a:off x="1095573" y="2339478"/>
-            <a:ext cx="7004819" cy="4525963"/>
+            <a:off x="2639616" y="2204864"/>
+            <a:ext cx="8300962" cy="4525963"/>
           </a:xfrm>
         </p:spPr>
         <p:txBody>
           <a:bodyPr>
-            <a:normAutofit fontScale="92500"/>
+            <a:normAutofit/>
           </a:bodyPr>
           <a:lstStyle/>
           <a:p>
@@ -3342,7 +3330,7 @@
             <a:pPr marL="0" indent="0">
               <a:buNone/>
             </a:pPr>
-            <a:endParaRPr lang="zh-TW" altLang="en-US" dirty="0"/>
+            <a:endParaRPr lang="zh-TW" altLang="en-US" b="1" dirty="0"/>
           </a:p>
         </p:txBody>
       </p:sp>
@@ -3400,7 +3388,7 @@
         <p:spPr bwMode="auto">
           <a:xfrm>
             <a:off x="0" y="-31973"/>
-            <a:ext cx="9144000" cy="6889973"/>
+            <a:ext cx="12288688" cy="6889973"/>
           </a:xfrm>
           <a:prstGeom prst="rect">
             <a:avLst/>
@@ -3429,8 +3417,8 @@
         </p:nvSpPr>
         <p:spPr>
           <a:xfrm>
-            <a:off x="611560" y="2204864"/>
-            <a:ext cx="8229600" cy="4525963"/>
+            <a:off x="2063552" y="1700808"/>
+            <a:ext cx="9505056" cy="4886004"/>
           </a:xfrm>
         </p:spPr>
         <p:txBody>
@@ -3443,7 +3431,7 @@
               <a:buNone/>
             </a:pPr>
             <a:r>
-              <a:rPr lang="zh-TW" altLang="en-US" sz="5400" b="1" dirty="0">
+              <a:rPr lang="zh-TW" altLang="en-US" sz="6000" b="1" dirty="0">
                 <a:solidFill>
                   <a:srgbClr val="C00000"/>
                 </a:solidFill>
@@ -3458,7 +3446,7 @@
               <a:buNone/>
             </a:pPr>
             <a:r>
-              <a:rPr lang="zh-TW" altLang="en-US" sz="5400" b="1" dirty="0">
+              <a:rPr lang="zh-TW" altLang="en-US" sz="6000" b="1" dirty="0">
                 <a:solidFill>
                   <a:srgbClr val="C00000"/>
                 </a:solidFill>
@@ -3473,7 +3461,7 @@
               <a:buNone/>
             </a:pPr>
             <a:r>
-              <a:rPr lang="zh-TW" altLang="en-US" sz="5400" b="1" dirty="0">
+              <a:rPr lang="zh-TW" altLang="en-US" sz="6000" b="1" dirty="0">
                 <a:solidFill>
                   <a:srgbClr val="C00000"/>
                 </a:solidFill>
@@ -3488,7 +3476,7 @@
               <a:buNone/>
             </a:pPr>
             <a:r>
-              <a:rPr lang="zh-TW" altLang="en-US" sz="5400" b="1" dirty="0">
+              <a:rPr lang="zh-TW" altLang="en-US" sz="6000" b="1" dirty="0">
                 <a:solidFill>
                   <a:srgbClr val="C00000"/>
                 </a:solidFill>
@@ -3502,7 +3490,7 @@
             <a:pPr marL="0" indent="0">
               <a:buNone/>
             </a:pPr>
-            <a:endParaRPr lang="zh-TW" altLang="en-US" dirty="0"/>
+            <a:endParaRPr lang="zh-TW" altLang="en-US" sz="3600" b="1" dirty="0"/>
           </a:p>
         </p:txBody>
       </p:sp>
@@ -3559,8 +3547,8 @@
         </p:blipFill>
         <p:spPr bwMode="auto">
           <a:xfrm>
-            <a:off x="-14264" y="25"/>
-            <a:ext cx="9158263" cy="6858000"/>
+            <a:off x="0" y="25"/>
+            <a:ext cx="12191999" cy="6858000"/>
           </a:xfrm>
           <a:prstGeom prst="rect">
             <a:avLst/>
@@ -3589,19 +3577,21 @@
         </p:nvSpPr>
         <p:spPr>
           <a:xfrm>
-            <a:off x="374848" y="2492896"/>
-            <a:ext cx="8229600" cy="4525963"/>
+            <a:off x="1590326" y="2315389"/>
+            <a:ext cx="9011345" cy="4525963"/>
           </a:xfrm>
         </p:spPr>
         <p:txBody>
-          <a:bodyPr/>
+          <a:bodyPr>
+            <a:normAutofit/>
+          </a:bodyPr>
           <a:lstStyle/>
           <a:p>
             <a:pPr marL="0" indent="0">
               <a:buNone/>
             </a:pPr>
             <a:r>
-              <a:rPr lang="zh-TW" altLang="en-US" sz="5000" b="1" dirty="0">
+              <a:rPr lang="zh-TW" altLang="en-US" sz="5400" b="1" dirty="0">
                 <a:solidFill>
                   <a:srgbClr val="7030A0"/>
                 </a:solidFill>
@@ -3616,7 +3606,7 @@
               <a:buNone/>
             </a:pPr>
             <a:r>
-              <a:rPr lang="zh-TW" altLang="en-US" sz="5000" b="1" dirty="0">
+              <a:rPr lang="zh-TW" altLang="en-US" sz="5400" b="1" dirty="0">
                 <a:solidFill>
                   <a:srgbClr val="7030A0"/>
                 </a:solidFill>
@@ -3631,7 +3621,7 @@
               <a:buNone/>
             </a:pPr>
             <a:r>
-              <a:rPr lang="zh-TW" altLang="en-US" sz="5000" b="1" dirty="0">
+              <a:rPr lang="zh-TW" altLang="en-US" sz="5400" b="1" dirty="0">
                 <a:solidFill>
                   <a:srgbClr val="7030A0"/>
                 </a:solidFill>
@@ -3646,32 +3636,15 @@
               <a:buNone/>
             </a:pPr>
             <a:r>
-              <a:rPr lang="zh-TW" altLang="en-US" sz="5000" b="1" dirty="0">
+              <a:rPr lang="zh-TW" altLang="en-US" sz="5400" b="1" dirty="0">
                 <a:solidFill>
                   <a:srgbClr val="7030A0"/>
                 </a:solidFill>
                 <a:latin typeface="標楷體" pitchFamily="65" charset="-120"/>
                 <a:ea typeface="標楷體" pitchFamily="65" charset="-120"/>
               </a:rPr>
-              <a:t>聖誕主耶穌 是你我的</a:t>
-            </a:r>
-            <a:r>
-              <a:rPr lang="zh-TW" altLang="en-US" sz="5000" b="1" dirty="0" smtClean="0">
-                <a:solidFill>
-                  <a:srgbClr val="7030A0"/>
-                </a:solidFill>
-                <a:latin typeface="標楷體" pitchFamily="65" charset="-120"/>
-                <a:ea typeface="標楷體" pitchFamily="65" charset="-120"/>
-              </a:rPr>
-              <a:t>幫助</a:t>
-            </a:r>
-            <a:endParaRPr lang="zh-TW" altLang="en-US" sz="5000" b="1" dirty="0">
-              <a:solidFill>
-                <a:srgbClr val="7030A0"/>
-              </a:solidFill>
-              <a:latin typeface="標楷體" pitchFamily="65" charset="-120"/>
-              <a:ea typeface="標楷體" pitchFamily="65" charset="-120"/>
-            </a:endParaRPr>
+              <a:t>聖誕主耶穌 是你我的幫助</a:t>
+            </a:r>
           </a:p>
         </p:txBody>
       </p:sp>
@@ -3728,8 +3701,8 @@
         </p:blipFill>
         <p:spPr bwMode="auto">
           <a:xfrm flipV="1">
-            <a:off x="21133" y="-29149"/>
-            <a:ext cx="9122867" cy="6887148"/>
+            <a:off x="0" y="-29149"/>
+            <a:ext cx="12192000" cy="6887148"/>
           </a:xfrm>
           <a:prstGeom prst="rect">
             <a:avLst/>
@@ -3758,7 +3731,7 @@
         </p:nvSpPr>
         <p:spPr>
           <a:xfrm>
-            <a:off x="1619672" y="1700808"/>
+            <a:off x="3143672" y="1700809"/>
             <a:ext cx="7128792" cy="4525963"/>
           </a:xfrm>
         </p:spPr>
@@ -3824,25 +3797,8 @@
                 <a:latin typeface="標楷體" pitchFamily="65" charset="-120"/>
                 <a:ea typeface="標楷體" pitchFamily="65" charset="-120"/>
               </a:rPr>
-              <a:t>為我們帶來</a:t>
-            </a:r>
-            <a:r>
-              <a:rPr lang="zh-TW" altLang="en-US" sz="6000" b="1" dirty="0" smtClean="0">
-                <a:solidFill>
-                  <a:srgbClr val="7030A0"/>
-                </a:solidFill>
-                <a:latin typeface="標楷體" pitchFamily="65" charset="-120"/>
-                <a:ea typeface="標楷體" pitchFamily="65" charset="-120"/>
-              </a:rPr>
-              <a:t>祝福</a:t>
-            </a:r>
-            <a:endParaRPr lang="zh-TW" altLang="en-US" sz="6000" b="1" dirty="0">
-              <a:solidFill>
-                <a:srgbClr val="7030A0"/>
-              </a:solidFill>
-              <a:latin typeface="標楷體" pitchFamily="65" charset="-120"/>
-              <a:ea typeface="標楷體" pitchFamily="65" charset="-120"/>
-            </a:endParaRPr>
+              <a:t>為我們帶來祝福</a:t>
+            </a:r>
           </a:p>
         </p:txBody>
       </p:sp>
@@ -3898,7 +3854,7 @@
         </p:blipFill>
         <p:spPr>
           <a:xfrm>
-            <a:off x="0" y="0"/>
+            <a:off x="1524001" y="0"/>
             <a:ext cx="9143999" cy="6858000"/>
           </a:xfrm>
           <a:prstGeom prst="rect">
@@ -3918,8 +3874,8 @@
         </p:nvSpPr>
         <p:spPr>
           <a:xfrm>
-            <a:off x="2987824" y="487213"/>
-            <a:ext cx="6696744" cy="4525963"/>
+            <a:off x="4511824" y="487214"/>
+            <a:ext cx="7488832" cy="5174034"/>
           </a:xfrm>
         </p:spPr>
         <p:txBody>
@@ -3932,24 +3888,14 @@
               <a:buNone/>
             </a:pPr>
             <a:r>
-              <a:rPr lang="zh-TW" altLang="en-US" sz="5800" b="1" dirty="0" smtClean="0">
+              <a:rPr lang="zh-TW" altLang="en-US" sz="6000" b="1" dirty="0">
                 <a:solidFill>
                   <a:srgbClr val="FF0000"/>
                 </a:solidFill>
                 <a:latin typeface="標楷體" pitchFamily="65" charset="-120"/>
                 <a:ea typeface="標楷體" pitchFamily="65" charset="-120"/>
               </a:rPr>
-              <a:t>沒有</a:t>
-            </a:r>
-            <a:r>
-              <a:rPr lang="zh-TW" altLang="en-US" sz="5800" b="1" dirty="0">
-                <a:solidFill>
-                  <a:srgbClr val="FF0000"/>
-                </a:solidFill>
-                <a:latin typeface="標楷體" pitchFamily="65" charset="-120"/>
-                <a:ea typeface="標楷體" pitchFamily="65" charset="-120"/>
-              </a:rPr>
-              <a:t>聖誕老公公</a:t>
+              <a:t>沒有聖誕老公公</a:t>
             </a:r>
           </a:p>
           <a:p>
@@ -3957,7 +3903,7 @@
               <a:buNone/>
             </a:pPr>
             <a:r>
-              <a:rPr lang="zh-TW" altLang="en-US" sz="5800" b="1" dirty="0">
+              <a:rPr lang="zh-TW" altLang="en-US" sz="6000" b="1" dirty="0">
                 <a:solidFill>
                   <a:srgbClr val="FF0000"/>
                 </a:solidFill>
@@ -3972,7 +3918,7 @@
               <a:buNone/>
             </a:pPr>
             <a:r>
-              <a:rPr lang="zh-TW" altLang="en-US" sz="5800" b="1" dirty="0">
+              <a:rPr lang="zh-TW" altLang="en-US" sz="6000" b="1" dirty="0">
                 <a:solidFill>
                   <a:srgbClr val="FF0000"/>
                 </a:solidFill>
@@ -3987,32 +3933,15 @@
               <a:buNone/>
             </a:pPr>
             <a:r>
-              <a:rPr lang="zh-TW" altLang="en-US" sz="5800" b="1" dirty="0">
+              <a:rPr lang="zh-TW" altLang="en-US" sz="6000" b="1" dirty="0">
                 <a:solidFill>
                   <a:srgbClr val="FF0000"/>
                 </a:solidFill>
                 <a:latin typeface="標楷體" pitchFamily="65" charset="-120"/>
                 <a:ea typeface="標楷體" pitchFamily="65" charset="-120"/>
               </a:rPr>
-              <a:t>耶穌給我們</a:t>
-            </a:r>
-            <a:r>
-              <a:rPr lang="zh-TW" altLang="en-US" sz="5800" b="1" dirty="0" smtClean="0">
-                <a:solidFill>
-                  <a:srgbClr val="FF0000"/>
-                </a:solidFill>
-                <a:latin typeface="標楷體" pitchFamily="65" charset="-120"/>
-                <a:ea typeface="標楷體" pitchFamily="65" charset="-120"/>
-              </a:rPr>
-              <a:t>禮物</a:t>
-            </a:r>
-            <a:endParaRPr lang="zh-TW" altLang="en-US" sz="5800" b="1" dirty="0">
-              <a:solidFill>
-                <a:srgbClr val="FF0000"/>
-              </a:solidFill>
-              <a:latin typeface="標楷體" pitchFamily="65" charset="-120"/>
-              <a:ea typeface="標楷體" pitchFamily="65" charset="-120"/>
-            </a:endParaRPr>
+              <a:t>耶穌給我們禮物</a:t>
+            </a:r>
           </a:p>
         </p:txBody>
       </p:sp>
